--- a/presentation/SDAIA_Capstone_Presentation.pptx
+++ b/presentation/SDAIA_Capstone_Presentation.pptx
@@ -1133,7 +1133,7 @@
           <a:p>
             <a:r>
               <a:rPr lang="en-US" dirty="0"/>
-              <a:t>Close on the trade-offs, because a technical evaluation rewards defensible choices more than fashionable ones. The final quote is from the Day 5 slides themselves — end by tying the project back to the course thesis. Then open for questions.</a:t>
+              <a:t>Close on the trade-offs, because a technical evaluation rewards defensible choices more than fashionable ones. The final quote is from the Day 5 slides themselves - end by tying the project back to the course thesis. Then open for questions.</a:t>
             </a:r>
             <a:endParaRPr lang="en-US" dirty="0"/>
           </a:p>
@@ -2601,7 +2601,46 @@
         </p:nvSpPr>
         <p:spPr>
           <a:xfrm>
-            <a:off x="566928" y="5806440"/>
+            <a:off x="566928" y="5413248"/>
+            <a:ext cx="5486400" cy="292608"/>
+          </a:xfrm>
+          <a:prstGeom prst="rect">
+            <a:avLst/>
+          </a:prstGeom>
+          <a:noFill/>
+          <a:ln/>
+        </p:spPr>
+        <p:txBody>
+          <a:bodyPr wrap="square" lIns="0" tIns="0" rIns="0" bIns="0" rtlCol="0" anchor="t"/>
+          <a:lstStyle/>
+          <a:p>
+            <a:pPr algn="l" indent="0" marL="0">
+              <a:buNone/>
+            </a:pPr>
+            <a:r>
+              <a:rPr lang="en-US" sz="1500" b="1" dirty="0">
+                <a:solidFill>
+                  <a:srgbClr val="FFFFFF"/>
+                </a:solidFill>
+                <a:latin typeface="Calibri" pitchFamily="34" charset="0"/>
+                <a:ea typeface="Calibri" pitchFamily="34" charset="-122"/>
+                <a:cs typeface="Calibri" pitchFamily="34" charset="-120"/>
+              </a:rPr>
+              <a:t>Dana Wael Alhelal</a:t>
+            </a:r>
+            <a:endParaRPr lang="en-US" sz="1500" dirty="0"/>
+          </a:p>
+        </p:txBody>
+      </p:sp>
+      <p:sp>
+        <p:nvSpPr>
+          <p:cNvPr id="14" name="Text 12"/>
+          <p:cNvSpPr txBox="1"/>
+          <p:nvPr/>
+        </p:nvSpPr>
+        <p:spPr>
+          <a:xfrm>
+            <a:off x="566928" y="5760720"/>
             <a:ext cx="8229600" cy="274320"/>
           </a:xfrm>
           <a:prstGeom prst="rect">
